--- a/IBM Data Warehouse Module 2/Presentation/DWH_IBM_slide.pptx
+++ b/IBM Data Warehouse Module 2/Presentation/DWH_IBM_slide.pptx
@@ -5682,57 +5682,6 @@
                 </a:solidFill>
               </a:rPr>
               <a:t>phân tích giao dịch ngân hàng và AML</a:t>
-            </a:r>
-          </a:p>
-        </p:txBody>
-      </p:sp>
-      <p:sp>
-        <p:nvSpPr>
-          <p:cNvPr id="6" name="Rectangle 5">
-            <a:extLst>
-              <a:ext uri="{FF2B5EF4-FFF2-40B4-BE49-F238E27FC236}">
-                <a16:creationId xmlns:a16="http://schemas.microsoft.com/office/drawing/2014/main" id="{51167EC2-84CC-414C-95AA-C9567F7663F0}"/>
-              </a:ext>
-            </a:extLst>
-          </p:cNvPr>
-          <p:cNvSpPr>
-            <a:spLocks noGrp="1"/>
-          </p:cNvSpPr>
-          <p:nvPr/>
-        </p:nvSpPr>
-        <p:spPr>
-          <a:xfrm>
-            <a:off x="609600" y="3162300"/>
-            <a:ext cx="7905750" cy="266700"/>
-          </a:xfrm>
-          <a:prstGeom prst="rect">
-            <a:avLst/>
-          </a:prstGeom>
-          <a:noFill/>
-          <a:ln w="0">
-            <a:noFill/>
-            <a:prstDash val="solid"/>
-          </a:ln>
-        </p:spPr>
-        <p:txBody>
-          <a:bodyPr/>
-          <a:lstStyle/>
-          <a:p>
-            <a:pPr algn="l">
-              <a:buNone/>
-              <a:defRPr sz="1350" b="0">
-                <a:solidFill>
-                  <a:srgbClr val="F2D9DC"/>
-                </a:solidFill>
-              </a:defRPr>
-            </a:pPr>
-            <a:r>
-              <a:rPr sz="1350" b="0">
-                <a:solidFill>
-                  <a:srgbClr val="F2D9DC"/>
-                </a:solidFill>
-              </a:rPr>
-              <a:t>IBM AML HI-Medium  -  PostgreSQL  -  DBeaver  -  Power BI Service</a:t>
             </a:r>
           </a:p>
         </p:txBody>
